--- a/Results/INITIAL PLOTS/GP2_PLOTS.pptx
+++ b/Results/INITIAL PLOTS/GP2_PLOTS.pptx
@@ -107,6 +107,11 @@
       </a:defRPr>
     </a:lvl9pPr>
   </p:defaultTextStyle>
+  <p:extLst>
+    <p:ext uri="{EFAFB233-063F-42B5-8137-9DF3F51BA10A}">
+      <p15:sldGuideLst xmlns:p15="http://schemas.microsoft.com/office/powerpoint/2012/main"/>
+    </p:ext>
+  </p:extLst>
 </p:presentation>
 </file>
 
@@ -259,7 +264,7 @@
           <a:p>
             <a:fld id="{F0B2BA09-CF7C-406A-A98E-801C819E31FA}" type="datetimeFigureOut">
               <a:rPr lang="en-GB" smtClean="0"/>
-              <a:t>17/11/2025</a:t>
+              <a:t>28/12/2025</a:t>
             </a:fld>
             <a:endParaRPr lang="en-GB"/>
           </a:p>
@@ -459,7 +464,7 @@
           <a:p>
             <a:fld id="{F0B2BA09-CF7C-406A-A98E-801C819E31FA}" type="datetimeFigureOut">
               <a:rPr lang="en-GB" smtClean="0"/>
-              <a:t>17/11/2025</a:t>
+              <a:t>28/12/2025</a:t>
             </a:fld>
             <a:endParaRPr lang="en-GB"/>
           </a:p>
@@ -669,7 +674,7 @@
           <a:p>
             <a:fld id="{F0B2BA09-CF7C-406A-A98E-801C819E31FA}" type="datetimeFigureOut">
               <a:rPr lang="en-GB" smtClean="0"/>
-              <a:t>17/11/2025</a:t>
+              <a:t>28/12/2025</a:t>
             </a:fld>
             <a:endParaRPr lang="en-GB"/>
           </a:p>
@@ -869,7 +874,7 @@
           <a:p>
             <a:fld id="{F0B2BA09-CF7C-406A-A98E-801C819E31FA}" type="datetimeFigureOut">
               <a:rPr lang="en-GB" smtClean="0"/>
-              <a:t>17/11/2025</a:t>
+              <a:t>28/12/2025</a:t>
             </a:fld>
             <a:endParaRPr lang="en-GB"/>
           </a:p>
@@ -1145,7 +1150,7 @@
           <a:p>
             <a:fld id="{F0B2BA09-CF7C-406A-A98E-801C819E31FA}" type="datetimeFigureOut">
               <a:rPr lang="en-GB" smtClean="0"/>
-              <a:t>17/11/2025</a:t>
+              <a:t>28/12/2025</a:t>
             </a:fld>
             <a:endParaRPr lang="en-GB"/>
           </a:p>
@@ -1413,7 +1418,7 @@
           <a:p>
             <a:fld id="{F0B2BA09-CF7C-406A-A98E-801C819E31FA}" type="datetimeFigureOut">
               <a:rPr lang="en-GB" smtClean="0"/>
-              <a:t>17/11/2025</a:t>
+              <a:t>28/12/2025</a:t>
             </a:fld>
             <a:endParaRPr lang="en-GB"/>
           </a:p>
@@ -1828,7 +1833,7 @@
           <a:p>
             <a:fld id="{F0B2BA09-CF7C-406A-A98E-801C819E31FA}" type="datetimeFigureOut">
               <a:rPr lang="en-GB" smtClean="0"/>
-              <a:t>17/11/2025</a:t>
+              <a:t>28/12/2025</a:t>
             </a:fld>
             <a:endParaRPr lang="en-GB"/>
           </a:p>
@@ -1970,7 +1975,7 @@
           <a:p>
             <a:fld id="{F0B2BA09-CF7C-406A-A98E-801C819E31FA}" type="datetimeFigureOut">
               <a:rPr lang="en-GB" smtClean="0"/>
-              <a:t>17/11/2025</a:t>
+              <a:t>28/12/2025</a:t>
             </a:fld>
             <a:endParaRPr lang="en-GB"/>
           </a:p>
@@ -2083,7 +2088,7 @@
           <a:p>
             <a:fld id="{F0B2BA09-CF7C-406A-A98E-801C819E31FA}" type="datetimeFigureOut">
               <a:rPr lang="en-GB" smtClean="0"/>
-              <a:t>17/11/2025</a:t>
+              <a:t>28/12/2025</a:t>
             </a:fld>
             <a:endParaRPr lang="en-GB"/>
           </a:p>
@@ -2396,7 +2401,7 @@
           <a:p>
             <a:fld id="{F0B2BA09-CF7C-406A-A98E-801C819E31FA}" type="datetimeFigureOut">
               <a:rPr lang="en-GB" smtClean="0"/>
-              <a:t>17/11/2025</a:t>
+              <a:t>28/12/2025</a:t>
             </a:fld>
             <a:endParaRPr lang="en-GB"/>
           </a:p>
@@ -2685,7 +2690,7 @@
           <a:p>
             <a:fld id="{F0B2BA09-CF7C-406A-A98E-801C819E31FA}" type="datetimeFigureOut">
               <a:rPr lang="en-GB" smtClean="0"/>
-              <a:t>17/11/2025</a:t>
+              <a:t>28/12/2025</a:t>
             </a:fld>
             <a:endParaRPr lang="en-GB"/>
           </a:p>
@@ -2928,7 +2933,7 @@
           <a:p>
             <a:fld id="{F0B2BA09-CF7C-406A-A98E-801C819E31FA}" type="datetimeFigureOut">
               <a:rPr lang="en-GB" smtClean="0"/>
-              <a:t>17/11/2025</a:t>
+              <a:t>28/12/2025</a:t>
             </a:fld>
             <a:endParaRPr lang="en-GB"/>
           </a:p>
@@ -3573,8 +3578,52 @@
             </a:r>
             <a:r>
               <a:rPr lang="en-GB" dirty="0"/>
-              <a:t> response, with the highest RBC/oxygen score. Immune stress shows an unexpected but data-supported pattern: T1 has the highest immune health score, followed by T4 and T3, while T2 shows the highest relative immune stress. Each diet forms a distinct physiological signature across systems, demonstrating diet-specific effects.</a:t>
-            </a:r>
+              <a:t> response, with the highest RBC/oxygen score. Immune stress shows an unexpected but data-supported pattern: T1 has the highest immune health score, followed by T4 and T3, while T2 shows the highest relative immune stress. Each diet forms a distinct physiological signature across systems, demonstrating diet-specific effects. </a:t>
+            </a:r>
+          </a:p>
+        </p:txBody>
+      </p:sp>
+      <p:sp>
+        <p:nvSpPr>
+          <p:cNvPr id="3" name="Right Brace 2">
+            <a:extLst>
+              <a:ext uri="{FF2B5EF4-FFF2-40B4-BE49-F238E27FC236}">
+                <a16:creationId xmlns:a16="http://schemas.microsoft.com/office/drawing/2014/main" id="{5DB85D28-6359-3C8A-AF18-6B5D3517E1DB}"/>
+              </a:ext>
+            </a:extLst>
+          </p:cNvPr>
+          <p:cNvSpPr/>
+          <p:nvPr/>
+        </p:nvSpPr>
+        <p:spPr>
+          <a:xfrm rot="16200000">
+            <a:off x="8332470" y="3257550"/>
+            <a:ext cx="514350" cy="4930902"/>
+          </a:xfrm>
+          <a:prstGeom prst="rightBrace">
+            <a:avLst/>
+          </a:prstGeom>
+        </p:spPr>
+        <p:style>
+          <a:lnRef idx="2">
+            <a:schemeClr val="accent1"/>
+          </a:lnRef>
+          <a:fillRef idx="0">
+            <a:schemeClr val="accent1"/>
+          </a:fillRef>
+          <a:effectRef idx="1">
+            <a:schemeClr val="accent1"/>
+          </a:effectRef>
+          <a:fontRef idx="minor">
+            <a:schemeClr val="tx1"/>
+          </a:fontRef>
+        </p:style>
+        <p:txBody>
+          <a:bodyPr rtlCol="0" anchor="ctr"/>
+          <a:lstStyle/>
+          <a:p>
+            <a:pPr algn="ctr"/>
+            <a:endParaRPr lang="en-GB"/>
           </a:p>
         </p:txBody>
       </p:sp>
